--- a/make_presentation/templates/templates/creative/no_logo_4.pptx
+++ b/make_presentation/templates/templates/creative/no_logo_4.pptx
@@ -70,19 +70,7 @@
               <a:rPr b="0" lang="en-US" sz="4400" spc="-1" strike="noStrike">
                 <a:latin typeface="Arial"/>
               </a:rPr>
-              <a:t>Click to </a:t>
-            </a:r>
-            <a:r>
-              <a:rPr b="0" lang="en-US" sz="4400" spc="-1" strike="noStrike">
-                <a:latin typeface="Arial"/>
-              </a:rPr>
-              <a:t>move </a:t>
-            </a:r>
-            <a:r>
-              <a:rPr b="0" lang="en-US" sz="4400" spc="-1" strike="noStrike">
-                <a:latin typeface="Arial"/>
-              </a:rPr>
-              <a:t>the slide</a:t>
+              <a:t>Click to move the slide</a:t>
             </a:r>
             <a:endParaRPr b="0" lang="en-US" sz="4400" spc="-1" strike="noStrike">
               <a:latin typeface="Arial"/>
@@ -122,13 +110,7 @@
               <a:rPr b="0" lang="en-US" sz="2000" spc="-1" strike="noStrike">
                 <a:latin typeface="Arial"/>
               </a:rPr>
-              <a:t>Click to edit the </a:t>
-            </a:r>
-            <a:r>
-              <a:rPr b="0" lang="en-US" sz="2000" spc="-1" strike="noStrike">
-                <a:latin typeface="Arial"/>
-              </a:rPr>
-              <a:t>notes format</a:t>
+              <a:t>Click to edit the notes format</a:t>
             </a:r>
             <a:endParaRPr b="0" lang="en-US" sz="2000" spc="-1" strike="noStrike">
               <a:latin typeface="Arial"/>
@@ -313,7 +295,7 @@
             <a:pPr algn="r">
               <a:buNone/>
             </a:pPr>
-            <a:fld id="{18A0B1EC-2E5D-434B-AA57-9524BBAAC084}" type="slidenum">
+            <a:fld id="{3D5C6A6A-0928-40D7-AAAD-B5658C3885A4}" type="slidenum">
               <a:rPr b="0" lang="en-US" sz="1400" spc="-1" strike="noStrike">
                 <a:latin typeface="Times New Roman"/>
               </a:rPr>
@@ -361,7 +343,7 @@
         <p:spPr>
           <a:xfrm>
             <a:off x="685800" y="1143000"/>
-            <a:ext cx="5485680" cy="3085560"/>
+            <a:ext cx="5485320" cy="3085200"/>
           </a:xfrm>
           <a:prstGeom prst="rect">
             <a:avLst/>
@@ -384,7 +366,7 @@
         <p:spPr>
           <a:xfrm>
             <a:off x="685800" y="4400640"/>
-            <a:ext cx="5485680" cy="3599640"/>
+            <a:ext cx="5485320" cy="3599280"/>
           </a:xfrm>
           <a:prstGeom prst="rect">
             <a:avLst/>
@@ -418,7 +400,7 @@
         <p:spPr>
           <a:xfrm>
             <a:off x="3884760" y="8685360"/>
-            <a:ext cx="2971080" cy="457920"/>
+            <a:ext cx="2970720" cy="457560"/>
           </a:xfrm>
           <a:prstGeom prst="rect">
             <a:avLst/>
@@ -450,7 +432,7 @@
               </a:lnSpc>
               <a:buNone/>
             </a:pPr>
-            <a:fld id="{B0D219C2-E03D-424F-9205-372CF0CFB9FD}" type="slidenum">
+            <a:fld id="{643D1957-6C81-4537-97A8-C4708ADE6276}" type="slidenum">
               <a:rPr b="0" lang="ru-RU" sz="1200" spc="-1" strike="noStrike">
                 <a:latin typeface="Times New Roman"/>
               </a:rPr>
@@ -497,7 +479,7 @@
         <p:spPr>
           <a:xfrm>
             <a:off x="685800" y="1143000"/>
-            <a:ext cx="5485680" cy="3085560"/>
+            <a:ext cx="5485320" cy="3085200"/>
           </a:xfrm>
           <a:prstGeom prst="rect">
             <a:avLst/>
@@ -520,7 +502,7 @@
         <p:spPr>
           <a:xfrm>
             <a:off x="685800" y="4400640"/>
-            <a:ext cx="5485680" cy="3599640"/>
+            <a:ext cx="5485320" cy="3599280"/>
           </a:xfrm>
           <a:prstGeom prst="rect">
             <a:avLst/>
@@ -554,7 +536,7 @@
         <p:spPr>
           <a:xfrm>
             <a:off x="3884760" y="8685360"/>
-            <a:ext cx="2971080" cy="457920"/>
+            <a:ext cx="2970720" cy="457560"/>
           </a:xfrm>
           <a:prstGeom prst="rect">
             <a:avLst/>
@@ -586,7 +568,7 @@
               </a:lnSpc>
               <a:buNone/>
             </a:pPr>
-            <a:fld id="{6238FD91-4166-4AD7-99AA-4A7FCC2CB561}" type="slidenum">
+            <a:fld id="{D7BE09A6-E3D1-4BBC-8E27-20979BE47FDF}" type="slidenum">
               <a:rPr b="0" lang="ru-RU" sz="1200" spc="-1" strike="noStrike">
                 <a:latin typeface="Times New Roman"/>
               </a:rPr>
@@ -654,7 +636,7 @@
         <p:txBody>
           <a:bodyPr/>
           <a:p>
-            <a:fld id="{413DF319-10D3-4F71-8D38-972E65DA8FFE}" type="slidenum">
+            <a:fld id="{DCECF719-BD2B-4475-9222-093BCBF65DDF}" type="slidenum">
               <a:t>&lt;#&gt;</a:t>
             </a:fld>
           </a:p>
@@ -716,7 +698,7 @@
         <p:spPr>
           <a:xfrm>
             <a:off x="1143000" y="841680"/>
-            <a:ext cx="6857280" cy="1789920"/>
+            <a:ext cx="6856920" cy="1789560"/>
           </a:xfrm>
           <a:prstGeom prst="rect">
             <a:avLst/>
@@ -753,7 +735,7 @@
         <p:spPr>
           <a:xfrm>
             <a:off x="457200" y="1203480"/>
-            <a:ext cx="8229240" cy="1422720"/>
+            <a:ext cx="8228880" cy="1422360"/>
           </a:xfrm>
           <a:prstGeom prst="rect">
             <a:avLst/>
@@ -786,8 +768,8 @@
         </p:nvSpPr>
         <p:spPr>
           <a:xfrm>
-            <a:off x="457200" y="2761920"/>
-            <a:ext cx="8229240" cy="1422720"/>
+            <a:off x="457200" y="2761200"/>
+            <a:ext cx="8228880" cy="1422360"/>
           </a:xfrm>
           <a:prstGeom prst="rect">
             <a:avLst/>
@@ -842,7 +824,7 @@
         <p:txBody>
           <a:bodyPr/>
           <a:p>
-            <a:fld id="{25E0F2EA-7081-4ECB-A20F-0AD8F86CB572}" type="slidenum">
+            <a:fld id="{F24EFD56-4EAE-494C-A924-858014F86981}" type="slidenum">
               <a:t>&lt;#&gt;</a:t>
             </a:fld>
           </a:p>
@@ -904,7 +886,7 @@
         <p:spPr>
           <a:xfrm>
             <a:off x="1143000" y="841680"/>
-            <a:ext cx="6857280" cy="1789920"/>
+            <a:ext cx="6856920" cy="1789560"/>
           </a:xfrm>
           <a:prstGeom prst="rect">
             <a:avLst/>
@@ -941,7 +923,7 @@
         <p:spPr>
           <a:xfrm>
             <a:off x="457200" y="1203480"/>
-            <a:ext cx="4015800" cy="1422720"/>
+            <a:ext cx="4015440" cy="1422360"/>
           </a:xfrm>
           <a:prstGeom prst="rect">
             <a:avLst/>
@@ -974,8 +956,8 @@
         </p:nvSpPr>
         <p:spPr>
           <a:xfrm>
-            <a:off x="4674240" y="1203480"/>
-            <a:ext cx="4015800" cy="1422720"/>
+            <a:off x="4673880" y="1203480"/>
+            <a:ext cx="4015440" cy="1422360"/>
           </a:xfrm>
           <a:prstGeom prst="rect">
             <a:avLst/>
@@ -1008,8 +990,8 @@
         </p:nvSpPr>
         <p:spPr>
           <a:xfrm>
-            <a:off x="457200" y="2761920"/>
-            <a:ext cx="4015800" cy="1422720"/>
+            <a:off x="457200" y="2761200"/>
+            <a:ext cx="4015440" cy="1422360"/>
           </a:xfrm>
           <a:prstGeom prst="rect">
             <a:avLst/>
@@ -1042,8 +1024,8 @@
         </p:nvSpPr>
         <p:spPr>
           <a:xfrm>
-            <a:off x="4674240" y="2761920"/>
-            <a:ext cx="4015800" cy="1422720"/>
+            <a:off x="4673880" y="2761200"/>
+            <a:ext cx="4015440" cy="1422360"/>
           </a:xfrm>
           <a:prstGeom prst="rect">
             <a:avLst/>
@@ -1098,7 +1080,7 @@
         <p:txBody>
           <a:bodyPr/>
           <a:p>
-            <a:fld id="{6F6C0493-D5D5-45C3-BB0A-F0B2D3915DF5}" type="slidenum">
+            <a:fld id="{E94ABE34-9D8C-42DC-8CDE-CC574D6B3AA4}" type="slidenum">
               <a:t>&lt;#&gt;</a:t>
             </a:fld>
           </a:p>
@@ -1160,7 +1142,7 @@
         <p:spPr>
           <a:xfrm>
             <a:off x="1143000" y="841680"/>
-            <a:ext cx="6857280" cy="1789920"/>
+            <a:ext cx="6856920" cy="1789560"/>
           </a:xfrm>
           <a:prstGeom prst="rect">
             <a:avLst/>
@@ -1197,7 +1179,7 @@
         <p:spPr>
           <a:xfrm>
             <a:off x="457200" y="1203480"/>
-            <a:ext cx="2649600" cy="1422720"/>
+            <a:ext cx="2649600" cy="1422360"/>
           </a:xfrm>
           <a:prstGeom prst="rect">
             <a:avLst/>
@@ -1231,7 +1213,7 @@
         <p:spPr>
           <a:xfrm>
             <a:off x="3239640" y="1203480"/>
-            <a:ext cx="2649600" cy="1422720"/>
+            <a:ext cx="2649600" cy="1422360"/>
           </a:xfrm>
           <a:prstGeom prst="rect">
             <a:avLst/>
@@ -1265,7 +1247,7 @@
         <p:spPr>
           <a:xfrm>
             <a:off x="6022080" y="1203480"/>
-            <a:ext cx="2649600" cy="1422720"/>
+            <a:ext cx="2649600" cy="1422360"/>
           </a:xfrm>
           <a:prstGeom prst="rect">
             <a:avLst/>
@@ -1298,8 +1280,8 @@
         </p:nvSpPr>
         <p:spPr>
           <a:xfrm>
-            <a:off x="457200" y="2761920"/>
-            <a:ext cx="2649600" cy="1422720"/>
+            <a:off x="457200" y="2761200"/>
+            <a:ext cx="2649600" cy="1422360"/>
           </a:xfrm>
           <a:prstGeom prst="rect">
             <a:avLst/>
@@ -1332,8 +1314,8 @@
         </p:nvSpPr>
         <p:spPr>
           <a:xfrm>
-            <a:off x="3239640" y="2761920"/>
-            <a:ext cx="2649600" cy="1422720"/>
+            <a:off x="3239640" y="2761200"/>
+            <a:ext cx="2649600" cy="1422360"/>
           </a:xfrm>
           <a:prstGeom prst="rect">
             <a:avLst/>
@@ -1366,8 +1348,8 @@
         </p:nvSpPr>
         <p:spPr>
           <a:xfrm>
-            <a:off x="6022080" y="2761920"/>
-            <a:ext cx="2649600" cy="1422720"/>
+            <a:off x="6022080" y="2761200"/>
+            <a:ext cx="2649600" cy="1422360"/>
           </a:xfrm>
           <a:prstGeom prst="rect">
             <a:avLst/>
@@ -1422,7 +1404,7 @@
         <p:txBody>
           <a:bodyPr/>
           <a:p>
-            <a:fld id="{9C465C0B-8AB7-4BE4-B64B-14956BEF2487}" type="slidenum">
+            <a:fld id="{8D55A35F-0CCE-4F5D-A4ED-D3E1760A11F9}" type="slidenum">
               <a:t>&lt;#&gt;</a:t>
             </a:fld>
           </a:p>
@@ -1484,7 +1466,7 @@
         <p:spPr>
           <a:xfrm>
             <a:off x="1143000" y="841680"/>
-            <a:ext cx="6857280" cy="1789920"/>
+            <a:ext cx="6856920" cy="1789560"/>
           </a:xfrm>
           <a:prstGeom prst="rect">
             <a:avLst/>
@@ -1521,7 +1503,7 @@
         <p:spPr>
           <a:xfrm>
             <a:off x="457200" y="1203480"/>
-            <a:ext cx="8229240" cy="2982960"/>
+            <a:ext cx="8228880" cy="2982600"/>
           </a:xfrm>
           <a:prstGeom prst="rect">
             <a:avLst/>
@@ -1579,7 +1561,7 @@
         <p:txBody>
           <a:bodyPr/>
           <a:p>
-            <a:fld id="{12AA9EAD-4631-4516-93FD-44854C87351E}" type="slidenum">
+            <a:fld id="{08C147EE-A3B5-4F82-A449-7CE1495AF8D9}" type="slidenum">
               <a:t>&lt;#&gt;</a:t>
             </a:fld>
           </a:p>
@@ -1641,7 +1623,7 @@
         <p:spPr>
           <a:xfrm>
             <a:off x="1143000" y="841680"/>
-            <a:ext cx="6857280" cy="1789920"/>
+            <a:ext cx="6856920" cy="1789560"/>
           </a:xfrm>
           <a:prstGeom prst="rect">
             <a:avLst/>
@@ -1678,7 +1660,7 @@
         <p:spPr>
           <a:xfrm>
             <a:off x="457200" y="1203480"/>
-            <a:ext cx="8229240" cy="2982960"/>
+            <a:ext cx="8228880" cy="2982600"/>
           </a:xfrm>
           <a:prstGeom prst="rect">
             <a:avLst/>
@@ -1733,7 +1715,7 @@
         <p:txBody>
           <a:bodyPr/>
           <a:p>
-            <a:fld id="{4D984343-16D7-4658-9E02-6887816C113F}" type="slidenum">
+            <a:fld id="{7994FDA0-3705-4923-AB78-4BF0CBF496AD}" type="slidenum">
               <a:t>&lt;#&gt;</a:t>
             </a:fld>
           </a:p>
@@ -1795,7 +1777,7 @@
         <p:spPr>
           <a:xfrm>
             <a:off x="1143000" y="841680"/>
-            <a:ext cx="6857280" cy="1789920"/>
+            <a:ext cx="6856920" cy="1789560"/>
           </a:xfrm>
           <a:prstGeom prst="rect">
             <a:avLst/>
@@ -1832,7 +1814,7 @@
         <p:spPr>
           <a:xfrm>
             <a:off x="457200" y="1203480"/>
-            <a:ext cx="4015800" cy="2982960"/>
+            <a:ext cx="4015440" cy="2982600"/>
           </a:xfrm>
           <a:prstGeom prst="rect">
             <a:avLst/>
@@ -1865,8 +1847,8 @@
         </p:nvSpPr>
         <p:spPr>
           <a:xfrm>
-            <a:off x="4674240" y="1203480"/>
-            <a:ext cx="4015800" cy="2982960"/>
+            <a:off x="4673880" y="1203480"/>
+            <a:ext cx="4015440" cy="2982600"/>
           </a:xfrm>
           <a:prstGeom prst="rect">
             <a:avLst/>
@@ -1921,7 +1903,7 @@
         <p:txBody>
           <a:bodyPr/>
           <a:p>
-            <a:fld id="{8659923A-09E3-4504-92B7-2E147B6EE296}" type="slidenum">
+            <a:fld id="{0E8DB2E9-957D-44B2-9542-95B47BF0B048}" type="slidenum">
               <a:t>&lt;#&gt;</a:t>
             </a:fld>
           </a:p>
@@ -1983,7 +1965,7 @@
         <p:spPr>
           <a:xfrm>
             <a:off x="1143000" y="841680"/>
-            <a:ext cx="6857280" cy="1789920"/>
+            <a:ext cx="6856920" cy="1789560"/>
           </a:xfrm>
           <a:prstGeom prst="rect">
             <a:avLst/>
@@ -2041,7 +2023,7 @@
         <p:txBody>
           <a:bodyPr/>
           <a:p>
-            <a:fld id="{35049922-B17D-444A-AA67-F73645D8D6A6}" type="slidenum">
+            <a:fld id="{64691D07-64C4-4D07-99BD-31192115AAA7}" type="slidenum">
               <a:t>&lt;#&gt;</a:t>
             </a:fld>
           </a:p>
@@ -2103,7 +2085,7 @@
         <p:spPr>
           <a:xfrm>
             <a:off x="1143000" y="841680"/>
-            <a:ext cx="6857280" cy="8298360"/>
+            <a:ext cx="6856920" cy="8296560"/>
           </a:xfrm>
           <a:prstGeom prst="rect">
             <a:avLst/>
@@ -2161,7 +2143,7 @@
         <p:txBody>
           <a:bodyPr/>
           <a:p>
-            <a:fld id="{2C0E770C-7CB8-4B4D-9ED0-E971D49CED41}" type="slidenum">
+            <a:fld id="{4726A1B4-BF08-4B0E-892A-23B485E66D2C}" type="slidenum">
               <a:t>&lt;#&gt;</a:t>
             </a:fld>
           </a:p>
@@ -2223,7 +2205,7 @@
         <p:spPr>
           <a:xfrm>
             <a:off x="1143000" y="841680"/>
-            <a:ext cx="6857280" cy="1789920"/>
+            <a:ext cx="6856920" cy="1789560"/>
           </a:xfrm>
           <a:prstGeom prst="rect">
             <a:avLst/>
@@ -2260,7 +2242,7 @@
         <p:spPr>
           <a:xfrm>
             <a:off x="457200" y="1203480"/>
-            <a:ext cx="4015800" cy="1422720"/>
+            <a:ext cx="4015440" cy="1422360"/>
           </a:xfrm>
           <a:prstGeom prst="rect">
             <a:avLst/>
@@ -2293,8 +2275,8 @@
         </p:nvSpPr>
         <p:spPr>
           <a:xfrm>
-            <a:off x="4674240" y="1203480"/>
-            <a:ext cx="4015800" cy="2982960"/>
+            <a:off x="4673880" y="1203480"/>
+            <a:ext cx="4015440" cy="2982600"/>
           </a:xfrm>
           <a:prstGeom prst="rect">
             <a:avLst/>
@@ -2327,8 +2309,8 @@
         </p:nvSpPr>
         <p:spPr>
           <a:xfrm>
-            <a:off x="457200" y="2761920"/>
-            <a:ext cx="4015800" cy="1422720"/>
+            <a:off x="457200" y="2761200"/>
+            <a:ext cx="4015440" cy="1422360"/>
           </a:xfrm>
           <a:prstGeom prst="rect">
             <a:avLst/>
@@ -2383,7 +2365,7 @@
         <p:txBody>
           <a:bodyPr/>
           <a:p>
-            <a:fld id="{788176A7-D21D-4EF8-AC67-D10C18F07740}" type="slidenum">
+            <a:fld id="{0423608D-9A62-44F4-87BD-118D4E3DB0A5}" type="slidenum">
               <a:t>&lt;#&gt;</a:t>
             </a:fld>
           </a:p>
@@ -2445,7 +2427,7 @@
         <p:spPr>
           <a:xfrm>
             <a:off x="1143000" y="841680"/>
-            <a:ext cx="6857280" cy="1789920"/>
+            <a:ext cx="6856920" cy="1789560"/>
           </a:xfrm>
           <a:prstGeom prst="rect">
             <a:avLst/>
@@ -2482,7 +2464,7 @@
         <p:spPr>
           <a:xfrm>
             <a:off x="457200" y="1203480"/>
-            <a:ext cx="4015800" cy="2982960"/>
+            <a:ext cx="4015440" cy="2982600"/>
           </a:xfrm>
           <a:prstGeom prst="rect">
             <a:avLst/>
@@ -2515,8 +2497,8 @@
         </p:nvSpPr>
         <p:spPr>
           <a:xfrm>
-            <a:off x="4674240" y="1203480"/>
-            <a:ext cx="4015800" cy="1422720"/>
+            <a:off x="4673880" y="1203480"/>
+            <a:ext cx="4015440" cy="1422360"/>
           </a:xfrm>
           <a:prstGeom prst="rect">
             <a:avLst/>
@@ -2549,8 +2531,8 @@
         </p:nvSpPr>
         <p:spPr>
           <a:xfrm>
-            <a:off x="4674240" y="2761920"/>
-            <a:ext cx="4015800" cy="1422720"/>
+            <a:off x="4673880" y="2761200"/>
+            <a:ext cx="4015440" cy="1422360"/>
           </a:xfrm>
           <a:prstGeom prst="rect">
             <a:avLst/>
@@ -2605,7 +2587,7 @@
         <p:txBody>
           <a:bodyPr/>
           <a:p>
-            <a:fld id="{E68BEF1B-D823-4A35-9F0F-162A511F2198}" type="slidenum">
+            <a:fld id="{C9AF8C61-CADF-4E6A-AB2D-A83969A3DCB5}" type="slidenum">
               <a:t>&lt;#&gt;</a:t>
             </a:fld>
           </a:p>
@@ -2667,7 +2649,7 @@
         <p:spPr>
           <a:xfrm>
             <a:off x="1143000" y="841680"/>
-            <a:ext cx="6857280" cy="1789920"/>
+            <a:ext cx="6856920" cy="1789560"/>
           </a:xfrm>
           <a:prstGeom prst="rect">
             <a:avLst/>
@@ -2704,7 +2686,7 @@
         <p:spPr>
           <a:xfrm>
             <a:off x="457200" y="1203480"/>
-            <a:ext cx="4015800" cy="1422720"/>
+            <a:ext cx="4015440" cy="1422360"/>
           </a:xfrm>
           <a:prstGeom prst="rect">
             <a:avLst/>
@@ -2737,8 +2719,8 @@
         </p:nvSpPr>
         <p:spPr>
           <a:xfrm>
-            <a:off x="4674240" y="1203480"/>
-            <a:ext cx="4015800" cy="1422720"/>
+            <a:off x="4673880" y="1203480"/>
+            <a:ext cx="4015440" cy="1422360"/>
           </a:xfrm>
           <a:prstGeom prst="rect">
             <a:avLst/>
@@ -2771,8 +2753,8 @@
         </p:nvSpPr>
         <p:spPr>
           <a:xfrm>
-            <a:off x="457200" y="2761920"/>
-            <a:ext cx="8229240" cy="1422720"/>
+            <a:off x="457200" y="2761200"/>
+            <a:ext cx="8228880" cy="1422360"/>
           </a:xfrm>
           <a:prstGeom prst="rect">
             <a:avLst/>
@@ -2827,7 +2809,7 @@
         <p:txBody>
           <a:bodyPr/>
           <a:p>
-            <a:fld id="{0CBB2687-8F9D-4751-A00A-D203B7763538}" type="slidenum">
+            <a:fld id="{6ECB8F44-6D17-45D1-8B1E-97A291F3FFCB}" type="slidenum">
               <a:t>&lt;#&gt;</a:t>
             </a:fld>
           </a:p>
@@ -2896,7 +2878,7 @@
         <p:spPr>
           <a:xfrm>
             <a:off x="1143000" y="841680"/>
-            <a:ext cx="6857280" cy="1789920"/>
+            <a:ext cx="6856920" cy="1789560"/>
           </a:xfrm>
           <a:prstGeom prst="rect">
             <a:avLst/>
@@ -2915,85 +2897,190 @@
               <a:rPr b="0" lang="en-US" sz="1800" spc="-1" strike="noStrike">
                 <a:latin typeface="Arial"/>
               </a:rPr>
-              <a:t>Cli</a:t>
-            </a:r>
+              <a:t>Click to edit the title text format</a:t>
+            </a:r>
+            <a:endParaRPr b="0" lang="en-US" sz="1800" spc="-1" strike="noStrike">
+              <a:latin typeface="Arial"/>
+            </a:endParaRPr>
+          </a:p>
+        </p:txBody>
+      </p:sp>
+      <p:sp>
+        <p:nvSpPr>
+          <p:cNvPr id="1" name="PlaceHolder 2"/>
+          <p:cNvSpPr>
+            <a:spLocks noGrp="1"/>
+          </p:cNvSpPr>
+          <p:nvPr>
+            <p:ph type="body"/>
+          </p:nvPr>
+        </p:nvSpPr>
+        <p:spPr>
+          <a:xfrm>
+            <a:off x="457200" y="1203480"/>
+            <a:ext cx="8228880" cy="2982600"/>
+          </a:xfrm>
+          <a:prstGeom prst="rect">
+            <a:avLst/>
+          </a:prstGeom>
+          <a:noFill/>
+          <a:ln w="0">
+            <a:noFill/>
+          </a:ln>
+        </p:spPr>
+        <p:txBody>
+          <a:bodyPr lIns="0" rIns="0" tIns="0" bIns="0" anchor="t">
+            <a:normAutofit/>
+          </a:bodyPr>
+          <a:p>
+            <a:pPr marL="432000" indent="-324000">
+              <a:spcBef>
+                <a:spcPts val="1417"/>
+              </a:spcBef>
+              <a:buClr>
+                <a:srgbClr val="000000"/>
+              </a:buClr>
+              <a:buSzPct val="45000"/>
+              <a:buFont typeface="Wingdings" charset="2"/>
+              <a:buChar char=""/>
+            </a:pPr>
             <a:r>
               <a:rPr b="0" lang="en-US" sz="1800" spc="-1" strike="noStrike">
                 <a:latin typeface="Arial"/>
               </a:rPr>
-              <a:t>ck </a:t>
-            </a:r>
+              <a:t>Click to edit the outline text format</a:t>
+            </a:r>
+            <a:endParaRPr b="0" lang="en-US" sz="1800" spc="-1" strike="noStrike">
+              <a:latin typeface="Arial"/>
+            </a:endParaRPr>
+          </a:p>
+          <a:p>
+            <a:pPr lvl="1" marL="864000" indent="-324000">
+              <a:spcBef>
+                <a:spcPts val="1134"/>
+              </a:spcBef>
+              <a:buClr>
+                <a:srgbClr val="000000"/>
+              </a:buClr>
+              <a:buSzPct val="75000"/>
+              <a:buFont typeface="Symbol" charset="2"/>
+              <a:buChar char=""/>
+            </a:pPr>
             <a:r>
               <a:rPr b="0" lang="en-US" sz="1800" spc="-1" strike="noStrike">
                 <a:latin typeface="Arial"/>
               </a:rPr>
-              <a:t>to </a:t>
-            </a:r>
+              <a:t>Second Outline Level</a:t>
+            </a:r>
+            <a:endParaRPr b="0" lang="en-US" sz="1800" spc="-1" strike="noStrike">
+              <a:latin typeface="Arial"/>
+            </a:endParaRPr>
+          </a:p>
+          <a:p>
+            <a:pPr lvl="2" marL="1296000" indent="-288000">
+              <a:spcBef>
+                <a:spcPts val="850"/>
+              </a:spcBef>
+              <a:buClr>
+                <a:srgbClr val="000000"/>
+              </a:buClr>
+              <a:buSzPct val="45000"/>
+              <a:buFont typeface="Wingdings" charset="2"/>
+              <a:buChar char=""/>
+            </a:pPr>
             <a:r>
               <a:rPr b="0" lang="en-US" sz="1800" spc="-1" strike="noStrike">
                 <a:latin typeface="Arial"/>
               </a:rPr>
-              <a:t>edi</a:t>
-            </a:r>
+              <a:t>Third Outline Level</a:t>
+            </a:r>
+            <a:endParaRPr b="0" lang="en-US" sz="1800" spc="-1" strike="noStrike">
+              <a:latin typeface="Arial"/>
+            </a:endParaRPr>
+          </a:p>
+          <a:p>
+            <a:pPr lvl="3" marL="1728000" indent="-216000">
+              <a:spcBef>
+                <a:spcPts val="567"/>
+              </a:spcBef>
+              <a:buClr>
+                <a:srgbClr val="000000"/>
+              </a:buClr>
+              <a:buSzPct val="75000"/>
+              <a:buFont typeface="Symbol" charset="2"/>
+              <a:buChar char=""/>
+            </a:pPr>
             <a:r>
               <a:rPr b="0" lang="en-US" sz="1800" spc="-1" strike="noStrike">
                 <a:latin typeface="Arial"/>
               </a:rPr>
-              <a:t>t </a:t>
-            </a:r>
+              <a:t>Fourth Outline Level</a:t>
+            </a:r>
+            <a:endParaRPr b="0" lang="en-US" sz="1800" spc="-1" strike="noStrike">
+              <a:latin typeface="Arial"/>
+            </a:endParaRPr>
+          </a:p>
+          <a:p>
+            <a:pPr lvl="4" marL="2160000" indent="-216000">
+              <a:spcBef>
+                <a:spcPts val="283"/>
+              </a:spcBef>
+              <a:buClr>
+                <a:srgbClr val="000000"/>
+              </a:buClr>
+              <a:buSzPct val="45000"/>
+              <a:buFont typeface="Wingdings" charset="2"/>
+              <a:buChar char=""/>
+            </a:pPr>
             <a:r>
               <a:rPr b="0" lang="en-US" sz="1800" spc="-1" strike="noStrike">
                 <a:latin typeface="Arial"/>
               </a:rPr>
-              <a:t>th</a:t>
-            </a:r>
+              <a:t>Fifth Outline Level</a:t>
+            </a:r>
+            <a:endParaRPr b="0" lang="en-US" sz="1800" spc="-1" strike="noStrike">
+              <a:latin typeface="Arial"/>
+            </a:endParaRPr>
+          </a:p>
+          <a:p>
+            <a:pPr lvl="5" marL="2592000" indent="-216000">
+              <a:spcBef>
+                <a:spcPts val="283"/>
+              </a:spcBef>
+              <a:buClr>
+                <a:srgbClr val="000000"/>
+              </a:buClr>
+              <a:buSzPct val="45000"/>
+              <a:buFont typeface="Wingdings" charset="2"/>
+              <a:buChar char=""/>
+            </a:pPr>
             <a:r>
               <a:rPr b="0" lang="en-US" sz="1800" spc="-1" strike="noStrike">
                 <a:latin typeface="Arial"/>
               </a:rPr>
-              <a:t>e </a:t>
-            </a:r>
+              <a:t>Sixth Outline Level</a:t>
+            </a:r>
+            <a:endParaRPr b="0" lang="en-US" sz="1800" spc="-1" strike="noStrike">
+              <a:latin typeface="Arial"/>
+            </a:endParaRPr>
+          </a:p>
+          <a:p>
+            <a:pPr lvl="6" marL="3024000" indent="-216000">
+              <a:spcBef>
+                <a:spcPts val="283"/>
+              </a:spcBef>
+              <a:buClr>
+                <a:srgbClr val="000000"/>
+              </a:buClr>
+              <a:buSzPct val="45000"/>
+              <a:buFont typeface="Wingdings" charset="2"/>
+              <a:buChar char=""/>
+            </a:pPr>
             <a:r>
               <a:rPr b="0" lang="en-US" sz="1800" spc="-1" strike="noStrike">
                 <a:latin typeface="Arial"/>
               </a:rPr>
-              <a:t>titl</a:t>
-            </a:r>
-            <a:r>
-              <a:rPr b="0" lang="en-US" sz="1800" spc="-1" strike="noStrike">
-                <a:latin typeface="Arial"/>
-              </a:rPr>
-              <a:t>e </a:t>
-            </a:r>
-            <a:r>
-              <a:rPr b="0" lang="en-US" sz="1800" spc="-1" strike="noStrike">
-                <a:latin typeface="Arial"/>
-              </a:rPr>
-              <a:t>tex</a:t>
-            </a:r>
-            <a:r>
-              <a:rPr b="0" lang="en-US" sz="1800" spc="-1" strike="noStrike">
-                <a:latin typeface="Arial"/>
-              </a:rPr>
-              <a:t>t </a:t>
-            </a:r>
-            <a:r>
-              <a:rPr b="0" lang="en-US" sz="1800" spc="-1" strike="noStrike">
-                <a:latin typeface="Arial"/>
-              </a:rPr>
-              <a:t>for</a:t>
-            </a:r>
-            <a:r>
-              <a:rPr b="0" lang="en-US" sz="1800" spc="-1" strike="noStrike">
-                <a:latin typeface="Arial"/>
-              </a:rPr>
-              <a:t>m</a:t>
-            </a:r>
-            <a:r>
-              <a:rPr b="0" lang="en-US" sz="1800" spc="-1" strike="noStrike">
-                <a:latin typeface="Arial"/>
-              </a:rPr>
-              <a:t>at</a:t>
+              <a:t>Seventh Outline Level</a:t>
             </a:r>
             <a:endParaRPr b="0" lang="en-US" sz="1800" spc="-1" strike="noStrike">
               <a:latin typeface="Arial"/>
@@ -3003,7 +3090,7 @@
       </p:sp>
       <p:sp>
         <p:nvSpPr>
-          <p:cNvPr id="1" name="PlaceHolder 2"/>
+          <p:cNvPr id="2" name="PlaceHolder 3"/>
           <p:cNvSpPr>
             <a:spLocks noGrp="1"/>
           </p:cNvSpPr>
@@ -3014,7 +3101,7 @@
         <p:spPr>
           <a:xfrm>
             <a:off x="3029040" y="4767120"/>
-            <a:ext cx="3085560" cy="273240"/>
+            <a:ext cx="3085200" cy="272880"/>
           </a:xfrm>
           <a:prstGeom prst="rect">
             <a:avLst/>
@@ -3060,7 +3147,7 @@
       </p:sp>
       <p:sp>
         <p:nvSpPr>
-          <p:cNvPr id="2" name="PlaceHolder 3"/>
+          <p:cNvPr id="3" name="PlaceHolder 4"/>
           <p:cNvSpPr>
             <a:spLocks noGrp="1"/>
           </p:cNvSpPr>
@@ -3071,7 +3158,7 @@
         <p:spPr>
           <a:xfrm>
             <a:off x="6458040" y="4767120"/>
-            <a:ext cx="2056680" cy="273240"/>
+            <a:ext cx="2056320" cy="272880"/>
           </a:xfrm>
           <a:prstGeom prst="rect">
             <a:avLst/>
@@ -3106,7 +3193,7 @@
               </a:lnSpc>
               <a:buNone/>
             </a:pPr>
-            <a:fld id="{93DE6196-D2D1-4B09-9E72-FBBFE095B493}" type="slidenum">
+            <a:fld id="{33BBCA7A-DF56-4548-87C3-E740A69FF28F}" type="slidenum">
               <a:rPr b="0" lang="en-US" sz="900" spc="-1" strike="noStrike">
                 <a:solidFill>
                   <a:srgbClr val="8b8b8b"/>
@@ -3123,7 +3210,7 @@
       </p:sp>
       <p:sp>
         <p:nvSpPr>
-          <p:cNvPr id="3" name="PlaceHolder 4"/>
+          <p:cNvPr id="4" name="PlaceHolder 5"/>
           <p:cNvSpPr>
             <a:spLocks noGrp="1"/>
           </p:cNvSpPr>
@@ -3134,7 +3221,7 @@
         <p:spPr>
           <a:xfrm>
             <a:off x="628560" y="4767120"/>
-            <a:ext cx="2056680" cy="273240"/>
+            <a:ext cx="2056320" cy="272880"/>
           </a:xfrm>
           <a:prstGeom prst="rect">
             <a:avLst/>
@@ -3164,189 +3251,6 @@
             </a:r>
             <a:endParaRPr b="0" lang="en-US" sz="1400" spc="-1" strike="noStrike">
               <a:latin typeface="Times New Roman"/>
-            </a:endParaRPr>
-          </a:p>
-        </p:txBody>
-      </p:sp>
-      <p:sp>
-        <p:nvSpPr>
-          <p:cNvPr id="4" name="PlaceHolder 5"/>
-          <p:cNvSpPr>
-            <a:spLocks noGrp="1"/>
-          </p:cNvSpPr>
-          <p:nvPr>
-            <p:ph type="body"/>
-          </p:nvPr>
-        </p:nvSpPr>
-        <p:spPr>
-          <a:xfrm>
-            <a:off x="457200" y="1203480"/>
-            <a:ext cx="8229240" cy="2982960"/>
-          </a:xfrm>
-          <a:prstGeom prst="rect">
-            <a:avLst/>
-          </a:prstGeom>
-          <a:noFill/>
-          <a:ln w="0">
-            <a:noFill/>
-          </a:ln>
-        </p:spPr>
-        <p:txBody>
-          <a:bodyPr lIns="0" rIns="0" tIns="0" bIns="0" anchor="t">
-            <a:normAutofit/>
-          </a:bodyPr>
-          <a:p>
-            <a:pPr marL="432000" indent="-324000">
-              <a:spcBef>
-                <a:spcPts val="1417"/>
-              </a:spcBef>
-              <a:buClr>
-                <a:srgbClr val="000000"/>
-              </a:buClr>
-              <a:buSzPct val="45000"/>
-              <a:buFont typeface="Wingdings" charset="2"/>
-              <a:buChar char=""/>
-            </a:pPr>
-            <a:r>
-              <a:rPr b="0" lang="en-US" sz="3200" spc="-1" strike="noStrike">
-                <a:latin typeface="Arial"/>
-              </a:rPr>
-              <a:t>Click to edit the outline text format</a:t>
-            </a:r>
-            <a:endParaRPr b="0" lang="en-US" sz="3200" spc="-1" strike="noStrike">
-              <a:latin typeface="Arial"/>
-            </a:endParaRPr>
-          </a:p>
-          <a:p>
-            <a:pPr lvl="1" marL="864000" indent="-324000">
-              <a:spcBef>
-                <a:spcPts val="1134"/>
-              </a:spcBef>
-              <a:buClr>
-                <a:srgbClr val="000000"/>
-              </a:buClr>
-              <a:buSzPct val="75000"/>
-              <a:buFont typeface="Symbol" charset="2"/>
-              <a:buChar char=""/>
-            </a:pPr>
-            <a:r>
-              <a:rPr b="0" lang="en-US" sz="2800" spc="-1" strike="noStrike">
-                <a:latin typeface="Arial"/>
-              </a:rPr>
-              <a:t>Second Outline Level</a:t>
-            </a:r>
-            <a:endParaRPr b="0" lang="en-US" sz="2800" spc="-1" strike="noStrike">
-              <a:latin typeface="Arial"/>
-            </a:endParaRPr>
-          </a:p>
-          <a:p>
-            <a:pPr lvl="2" marL="1296000" indent="-288000">
-              <a:spcBef>
-                <a:spcPts val="850"/>
-              </a:spcBef>
-              <a:buClr>
-                <a:srgbClr val="000000"/>
-              </a:buClr>
-              <a:buSzPct val="45000"/>
-              <a:buFont typeface="Wingdings" charset="2"/>
-              <a:buChar char=""/>
-            </a:pPr>
-            <a:r>
-              <a:rPr b="0" lang="en-US" sz="2400" spc="-1" strike="noStrike">
-                <a:latin typeface="Arial"/>
-              </a:rPr>
-              <a:t>Third Outline Level</a:t>
-            </a:r>
-            <a:endParaRPr b="0" lang="en-US" sz="2400" spc="-1" strike="noStrike">
-              <a:latin typeface="Arial"/>
-            </a:endParaRPr>
-          </a:p>
-          <a:p>
-            <a:pPr lvl="3" marL="1728000" indent="-216000">
-              <a:spcBef>
-                <a:spcPts val="567"/>
-              </a:spcBef>
-              <a:buClr>
-                <a:srgbClr val="000000"/>
-              </a:buClr>
-              <a:buSzPct val="75000"/>
-              <a:buFont typeface="Symbol" charset="2"/>
-              <a:buChar char=""/>
-            </a:pPr>
-            <a:r>
-              <a:rPr b="0" lang="en-US" sz="2000" spc="-1" strike="noStrike">
-                <a:latin typeface="Arial"/>
-              </a:rPr>
-              <a:t>Fourth Outline Level</a:t>
-            </a:r>
-            <a:endParaRPr b="0" lang="en-US" sz="2000" spc="-1" strike="noStrike">
-              <a:latin typeface="Arial"/>
-            </a:endParaRPr>
-          </a:p>
-          <a:p>
-            <a:pPr lvl="4" marL="2160000" indent="-216000">
-              <a:spcBef>
-                <a:spcPts val="283"/>
-              </a:spcBef>
-              <a:buClr>
-                <a:srgbClr val="000000"/>
-              </a:buClr>
-              <a:buSzPct val="45000"/>
-              <a:buFont typeface="Wingdings" charset="2"/>
-              <a:buChar char=""/>
-            </a:pPr>
-            <a:r>
-              <a:rPr b="0" lang="en-US" sz="2000" spc="-1" strike="noStrike">
-                <a:latin typeface="Arial"/>
-              </a:rPr>
-              <a:t>Fifth Outline Level</a:t>
-            </a:r>
-            <a:endParaRPr b="0" lang="en-US" sz="2000" spc="-1" strike="noStrike">
-              <a:latin typeface="Arial"/>
-            </a:endParaRPr>
-          </a:p>
-          <a:p>
-            <a:pPr lvl="5" marL="2592000" indent="-216000">
-              <a:spcBef>
-                <a:spcPts val="283"/>
-              </a:spcBef>
-              <a:buClr>
-                <a:srgbClr val="000000"/>
-              </a:buClr>
-              <a:buSzPct val="45000"/>
-              <a:buFont typeface="Wingdings" charset="2"/>
-              <a:buChar char=""/>
-            </a:pPr>
-            <a:r>
-              <a:rPr b="0" lang="en-US" sz="2000" spc="-1" strike="noStrike">
-                <a:latin typeface="Arial"/>
-              </a:rPr>
-              <a:t>Sixth Outline Level</a:t>
-            </a:r>
-            <a:endParaRPr b="0" lang="en-US" sz="2000" spc="-1" strike="noStrike">
-              <a:latin typeface="Arial"/>
-            </a:endParaRPr>
-          </a:p>
-          <a:p>
-            <a:pPr lvl="6" marL="3024000" indent="-216000">
-              <a:spcBef>
-                <a:spcPts val="283"/>
-              </a:spcBef>
-              <a:buClr>
-                <a:srgbClr val="000000"/>
-              </a:buClr>
-              <a:buSzPct val="45000"/>
-              <a:buFont typeface="Wingdings" charset="2"/>
-              <a:buChar char=""/>
-            </a:pPr>
-            <a:r>
-              <a:rPr b="0" lang="en-US" sz="2000" spc="-1" strike="noStrike">
-                <a:latin typeface="Arial"/>
-              </a:rPr>
-              <a:t>Seventh Outline Level</a:t>
-            </a:r>
-            <a:endParaRPr b="0" lang="en-US" sz="2000" spc="-1" strike="noStrike">
-              <a:latin typeface="Arial"/>
             </a:endParaRPr>
           </a:p>
         </p:txBody>
@@ -3397,7 +3301,7 @@
         <p:spPr>
           <a:xfrm>
             <a:off x="186840" y="178200"/>
-            <a:ext cx="8769960" cy="4757760"/>
+            <a:ext cx="8769600" cy="4757400"/>
           </a:xfrm>
           <a:prstGeom prst="roundRect">
             <a:avLst>
@@ -3435,7 +3339,7 @@
         <p:spPr>
           <a:xfrm>
             <a:off x="460080" y="622080"/>
-            <a:ext cx="6925680" cy="3306600"/>
+            <a:ext cx="6925320" cy="3306240"/>
           </a:xfrm>
           <a:prstGeom prst="rect">
             <a:avLst/>
@@ -3491,7 +3395,7 @@
         <p:spPr>
           <a:xfrm>
             <a:off x="5753880" y="2557440"/>
-            <a:ext cx="4009680" cy="3133080"/>
+            <a:ext cx="4009320" cy="3132720"/>
           </a:xfrm>
           <a:prstGeom prst="rect">
             <a:avLst/>
@@ -3544,7 +3448,7 @@
         <p:spPr>
           <a:xfrm>
             <a:off x="5753880" y="2557440"/>
-            <a:ext cx="4009680" cy="3133080"/>
+            <a:ext cx="4009320" cy="3132720"/>
           </a:xfrm>
           <a:prstGeom prst="rect">
             <a:avLst/>
@@ -3563,7 +3467,7 @@
         <p:spPr>
           <a:xfrm>
             <a:off x="185760" y="831240"/>
-            <a:ext cx="899280" cy="899280"/>
+            <a:ext cx="898920" cy="898920"/>
           </a:xfrm>
           <a:prstGeom prst="ellipse">
             <a:avLst/>
@@ -3623,7 +3527,7 @@
         <p:spPr>
           <a:xfrm>
             <a:off x="185760" y="2381400"/>
-            <a:ext cx="899280" cy="887400"/>
+            <a:ext cx="898920" cy="887040"/>
           </a:xfrm>
           <a:prstGeom prst="ellipse">
             <a:avLst/>
@@ -3683,7 +3587,7 @@
         <p:spPr>
           <a:xfrm>
             <a:off x="185760" y="3860640"/>
-            <a:ext cx="899280" cy="899280"/>
+            <a:ext cx="898920" cy="898920"/>
           </a:xfrm>
           <a:prstGeom prst="ellipse">
             <a:avLst/>
@@ -3743,7 +3647,7 @@
         <p:spPr>
           <a:xfrm>
             <a:off x="967680" y="797040"/>
-            <a:ext cx="3764520" cy="550440"/>
+            <a:ext cx="3764160" cy="550080"/>
           </a:xfrm>
           <a:prstGeom prst="rect">
             <a:avLst/>
@@ -3805,7 +3709,7 @@
         <p:spPr>
           <a:xfrm>
             <a:off x="967680" y="1332720"/>
-            <a:ext cx="3764520" cy="789480"/>
+            <a:ext cx="3764160" cy="789120"/>
           </a:xfrm>
           <a:prstGeom prst="rect">
             <a:avLst/>
@@ -3867,7 +3771,7 @@
         <p:spPr>
           <a:xfrm>
             <a:off x="964080" y="2292480"/>
-            <a:ext cx="3764520" cy="550440"/>
+            <a:ext cx="3764160" cy="550080"/>
           </a:xfrm>
           <a:prstGeom prst="rect">
             <a:avLst/>
@@ -3919,7 +3823,7 @@
         <p:spPr>
           <a:xfrm>
             <a:off x="964080" y="2825280"/>
-            <a:ext cx="3764520" cy="843120"/>
+            <a:ext cx="3764160" cy="842760"/>
           </a:xfrm>
           <a:prstGeom prst="rect">
             <a:avLst/>
@@ -3981,7 +3885,7 @@
         <p:spPr>
           <a:xfrm>
             <a:off x="964080" y="3777840"/>
-            <a:ext cx="3764520" cy="550440"/>
+            <a:ext cx="3764160" cy="550080"/>
           </a:xfrm>
           <a:prstGeom prst="rect">
             <a:avLst/>
@@ -4033,7 +3937,7 @@
         <p:spPr>
           <a:xfrm>
             <a:off x="964080" y="4310640"/>
-            <a:ext cx="3764520" cy="794520"/>
+            <a:ext cx="3764160" cy="794160"/>
           </a:xfrm>
           <a:prstGeom prst="rect">
             <a:avLst/>
@@ -4095,7 +3999,7 @@
         <p:spPr>
           <a:xfrm>
             <a:off x="5084640" y="987840"/>
-            <a:ext cx="3687480" cy="3496680"/>
+            <a:ext cx="3687120" cy="3496320"/>
           </a:xfrm>
           <a:prstGeom prst="roundRect">
             <a:avLst>
@@ -4159,7 +4063,7 @@
         <p:spPr>
           <a:xfrm>
             <a:off x="8519760" y="4831560"/>
-            <a:ext cx="484560" cy="226800"/>
+            <a:ext cx="484200" cy="226800"/>
           </a:xfrm>
           <a:prstGeom prst="rect">
             <a:avLst/>
@@ -4211,7 +4115,7 @@
         <p:spPr>
           <a:xfrm>
             <a:off x="421200" y="228600"/>
-            <a:ext cx="8457840" cy="685440"/>
+            <a:ext cx="8457480" cy="685080"/>
           </a:xfrm>
           <a:prstGeom prst="rect">
             <a:avLst/>
@@ -4240,7 +4144,11 @@
             </a:pPr>
             <a:r>
               <a:rPr b="0" lang="en-US" sz="1800" spc="-1" strike="noStrike">
+                <a:solidFill>
+                  <a:srgbClr val="000000"/>
+                </a:solidFill>
                 <a:latin typeface="Arial"/>
+                <a:ea typeface="DejaVu Sans"/>
               </a:rPr>
               <a:t>TITLE</a:t>
             </a:r>
@@ -4289,7 +4197,7 @@
         <p:spPr>
           <a:xfrm>
             <a:off x="506520" y="1484640"/>
-            <a:ext cx="2556720" cy="2055240"/>
+            <a:ext cx="2556360" cy="2054880"/>
           </a:xfrm>
           <a:prstGeom prst="roundRect">
             <a:avLst>
@@ -4329,7 +4237,7 @@
         <p:spPr>
           <a:xfrm>
             <a:off x="624240" y="1616760"/>
-            <a:ext cx="2289600" cy="729000"/>
+            <a:ext cx="2289240" cy="728640"/>
           </a:xfrm>
           <a:prstGeom prst="rect">
             <a:avLst/>
@@ -4381,7 +4289,7 @@
         <p:spPr>
           <a:xfrm>
             <a:off x="624240" y="2400480"/>
-            <a:ext cx="2289600" cy="1162080"/>
+            <a:ext cx="2289240" cy="1161720"/>
           </a:xfrm>
           <a:prstGeom prst="rect">
             <a:avLst/>
@@ -4443,7 +4351,7 @@
         <p:spPr>
           <a:xfrm>
             <a:off x="3309120" y="2066040"/>
-            <a:ext cx="2556720" cy="2055240"/>
+            <a:ext cx="2556360" cy="2054880"/>
           </a:xfrm>
           <a:prstGeom prst="roundRect">
             <a:avLst>
@@ -4483,7 +4391,7 @@
         <p:spPr>
           <a:xfrm>
             <a:off x="3426840" y="2198160"/>
-            <a:ext cx="2289600" cy="729000"/>
+            <a:ext cx="2289240" cy="728640"/>
           </a:xfrm>
           <a:prstGeom prst="rect">
             <a:avLst/>
@@ -4535,7 +4443,7 @@
         <p:spPr>
           <a:xfrm>
             <a:off x="3426840" y="2981880"/>
-            <a:ext cx="2289600" cy="1162080"/>
+            <a:ext cx="2289240" cy="1161720"/>
           </a:xfrm>
           <a:prstGeom prst="rect">
             <a:avLst/>
@@ -4587,7 +4495,7 @@
         <p:spPr>
           <a:xfrm>
             <a:off x="6111720" y="2659320"/>
-            <a:ext cx="2556720" cy="2055240"/>
+            <a:ext cx="2556360" cy="2054880"/>
           </a:xfrm>
           <a:prstGeom prst="roundRect">
             <a:avLst>
@@ -4627,7 +4535,7 @@
         <p:spPr>
           <a:xfrm>
             <a:off x="6229440" y="2791440"/>
-            <a:ext cx="2289600" cy="729000"/>
+            <a:ext cx="2289240" cy="728640"/>
           </a:xfrm>
           <a:prstGeom prst="rect">
             <a:avLst/>
@@ -4662,7 +4570,7 @@
                 <a:latin typeface="Arial"/>
                 <a:ea typeface="DejaVu Sans"/>
               </a:rPr>
-              <a:t>SUBTITLE2</a:t>
+              <a:t>SUBTITLE3</a:t>
             </a:r>
             <a:endParaRPr b="0" lang="en-US" sz="1400" spc="-1" strike="noStrike">
               <a:latin typeface="Arial"/>
@@ -4679,7 +4587,7 @@
         <p:spPr>
           <a:xfrm>
             <a:off x="6229440" y="3574800"/>
-            <a:ext cx="2289600" cy="1162080"/>
+            <a:ext cx="2289240" cy="1161720"/>
           </a:xfrm>
           <a:prstGeom prst="rect">
             <a:avLst/>
@@ -4714,7 +4622,7 @@
                 <a:latin typeface="Arial"/>
                 <a:ea typeface="DejaVu Sans"/>
               </a:rPr>
-              <a:t>TEXT2</a:t>
+              <a:t>TEXT3</a:t>
             </a:r>
             <a:endParaRPr b="0" lang="en-US" sz="1100" spc="-1" strike="noStrike">
               <a:latin typeface="Arial"/>
@@ -4731,7 +4639,7 @@
         <p:spPr>
           <a:xfrm>
             <a:off x="8519760" y="4831560"/>
-            <a:ext cx="484560" cy="226800"/>
+            <a:ext cx="484200" cy="226800"/>
           </a:xfrm>
           <a:prstGeom prst="rect">
             <a:avLst/>
@@ -4783,7 +4691,7 @@
         <p:spPr>
           <a:xfrm>
             <a:off x="457200" y="228600"/>
-            <a:ext cx="8229240" cy="1142640"/>
+            <a:ext cx="8228880" cy="1142280"/>
           </a:xfrm>
           <a:prstGeom prst="rect">
             <a:avLst/>
@@ -4812,7 +4720,11 @@
             </a:pPr>
             <a:r>
               <a:rPr b="0" lang="en-US" sz="1800" spc="-1" strike="noStrike">
+                <a:solidFill>
+                  <a:srgbClr val="000000"/>
+                </a:solidFill>
                 <a:latin typeface="Arial"/>
+                <a:ea typeface="DejaVu Sans"/>
               </a:rPr>
               <a:t>TITLE</a:t>
             </a:r>
@@ -4861,7 +4773,7 @@
         <p:spPr>
           <a:xfrm>
             <a:off x="186840" y="178200"/>
-            <a:ext cx="8769960" cy="4757760"/>
+            <a:ext cx="8769600" cy="4757400"/>
           </a:xfrm>
           <a:prstGeom prst="roundRect">
             <a:avLst>
@@ -4899,7 +4811,7 @@
         <p:spPr>
           <a:xfrm>
             <a:off x="460080" y="622080"/>
-            <a:ext cx="6925680" cy="3306600"/>
+            <a:ext cx="6925320" cy="3306240"/>
           </a:xfrm>
           <a:prstGeom prst="rect">
             <a:avLst/>
@@ -4955,7 +4867,7 @@
         <p:spPr>
           <a:xfrm>
             <a:off x="5753880" y="2557440"/>
-            <a:ext cx="4009680" cy="3133080"/>
+            <a:ext cx="4009320" cy="3132720"/>
           </a:xfrm>
           <a:prstGeom prst="rect">
             <a:avLst/>
